--- a/src/lib/report/assets/weekly-template.pptx
+++ b/src/lib/report/assets/weekly-template.pptx
@@ -11393,7 +11393,7 @@
                   </a:ext>
                 </a:extLst>
               </a:tr>
-              <a:tr h="1195036">
+              <a:tr h="2441008">
                 <a:tc>
                   <a:txBody>
                     <a:bodyPr/>
